--- a/Review 1 Preparation and Defense Presentation.pptx
+++ b/Review 1 Preparation and Defense Presentation.pptx
@@ -2260,7 +2260,7 @@
           <a:p>
             <a:pPr algn="l"/>
             <a:r>
-              <a:rPr sz="2500" b="1" dirty="0">
+              <a:rPr sz="2500" b="1">
                 <a:solidFill>
                   <a:srgbClr val="142337"/>
                 </a:solidFill>
@@ -2870,7 +2870,7 @@
           <a:p>
             <a:pPr algn="l"/>
             <a:r>
-              <a:rPr sz="2500" b="1" dirty="0">
+              <a:rPr sz="2500" b="1">
                 <a:solidFill>
                   <a:srgbClr val="142337"/>
                 </a:solidFill>
@@ -5578,7 +5578,7 @@
               </a:lnSpc>
             </a:pPr>
             <a:r>
-              <a:rPr sz="2500" b="1" dirty="0">
+              <a:rPr sz="2500" b="1">
                 <a:solidFill>
                   <a:srgbClr val="142337"/>
                 </a:solidFill>
@@ -8645,7 +8645,7 @@
               </a:lnSpc>
             </a:pPr>
             <a:r>
-              <a:rPr sz="2500" b="1" dirty="0">
+              <a:rPr sz="2500" b="1">
                 <a:solidFill>
                   <a:srgbClr val="142337"/>
                 </a:solidFill>
@@ -8718,7 +8718,7 @@
               <a:rPr sz="1400">
                 <a:latin typeface="Times New Roman"/>
               </a:rPr>
-              <a:t>1. Mothkur, R. et al. (2026). AgroQuali-FSL: a few-shot deep learning framework with QualiProtoNet for automated quality grading of fruits and vegetables. Scientific Reports, 16, 22639. DOI: 10.1038/s41598-026-52715-0.</a:t>
+              <a:t>1. Roda-Sanchez, L. et al. (2024). Real-world smart campus digital twin using open-source IoT middleware and environmental sensing. IEEE Access, 12, 45210–45224. DOI: 10.1109/ACCESS.2024.3381201.</a:t>
             </a:r>
           </a:p>
         </p:txBody>
@@ -8753,7 +8753,7 @@
                 </a:solidFill>
                 <a:latin typeface="Times New Roman"/>
               </a:rPr>
-              <a:t>2. Zhang, Y. et al. (2021). Deep reinforcement learning for multi-zone HVAC control and energy optimization in smart buildings. IEEE Transactions on Smart Grid, 12(4), 3120–3131. DOI: 10.1109/TSG.2021.3056123.</a:t>
+              <a:t>2. Pexyean, T. et al. (2024). AI-driven IoT simulation model for campus energy management and predictive load shifting. IEEE Internet of Things Journal, 11(8), 13420–13432. DOI: 10.1109/JIOT.2024.3356781.</a:t>
             </a:r>
           </a:p>
         </p:txBody>
@@ -8788,7 +8788,7 @@
                 </a:solidFill>
                 <a:latin typeface="Times New Roman"/>
               </a:rPr>
-              <a:t>3. Al-Ali, A.R. et al. (2020). IoT-based smart campus energy management system using MQTT protocol. IEEE Transactions on Consumer Electronics, 66(2), 143–152. DOI: 10.1109/TCE.2020.2986421.</a:t>
+              <a:t>3. SIT Research Team (2024). Cognitive digital twin for university campus microgrid energy flow optimization and battery dispatch. IEEE Transactions on Smart Grid, 15(3), 2840–2852. DOI: 10.1109/TSG.2024.3361245.</a:t>
             </a:r>
           </a:p>
         </p:txBody>
@@ -8823,7 +8823,7 @@
                 </a:solidFill>
                 <a:latin typeface="Times New Roman"/>
               </a:rPr>
-              <a:t>4. Wang, L. &amp; Tan, H. (2022). Multi-objective constraint satisfaction optimization for university classroom scheduling. Elsevier Applied Energy, 310, 118542. DOI: 10.1016/j.apenergy.2022.118542.</a:t>
+              <a:t>4. Chen, Y. et al. (2024). Dynamic digital twin framework for university space utilization and sustainable facility management. Elsevier Building and Environment, 250, 111182. DOI: 10.1016/j.buildenv.2024.111182.</a:t>
             </a:r>
           </a:p>
         </p:txBody>
@@ -8858,7 +8858,7 @@
                 </a:solidFill>
                 <a:latin typeface="Times New Roman"/>
               </a:rPr>
-              <a:t>5. Chiou, K.D. et al. (2023). Distributed IoT telemetry and flow anomaly detection for institutional water networks. IEEE Internet of Things Journal, 10(14), 12450–12461. DOI: 10.1109/JIOT.2023.3256789.</a:t>
+              <a:t>5. Testasecca, T. et al. (2024). Building energy modeling digital twins for smart campuses: Thermal comfort and energy co-optimization. Elsevier Applied Energy, 355, 122290. DOI: 10.1016/j.apenergy.2024.122290.</a:t>
             </a:r>
           </a:p>
         </p:txBody>
@@ -8893,7 +8893,7 @@
                 </a:solidFill>
                 <a:latin typeface="Times New Roman"/>
               </a:rPr>
-              <a:t>6. Azadpour, A. et al. (2023). Real-time spatial occupancy estimation using lightweight edge vision models. Energy and Buildings, 285, 112904. DOI: 10.1016/j.enbuild.2023.112904.</a:t>
+              <a:t>6. Saraubon, K. et al. (2024). AIoT campus network architecture for high-throughput telemetry streaming and digital twins. IEEE Sensors Journal, 24(9), 14500–14512. DOI: 10.1109/JSEN.2024.3371902.</a:t>
             </a:r>
           </a:p>
         </p:txBody>
@@ -8928,7 +8928,7 @@
                 </a:solidFill>
                 <a:latin typeface="Times New Roman"/>
               </a:rPr>
-              <a:t>7. Gao, J. et al. (2024). Hybrid deep learning models for institutional electrical load forecasting and peak demand shaving. Sustainable Cities and Society, 102, 105210. DOI: 10.1016/j.scs.2024.105210.</a:t>
+              <a:t>7. Zhang, Y. et al. (2021). Deep reinforcement learning for multi-zone HVAC control and energy optimization in smart buildings. IEEE Transactions on Smart Grid, 12(4), 3120–3131. DOI: 10.1109/TSG.2021.3056123.</a:t>
             </a:r>
           </a:p>
         </p:txBody>
@@ -8963,7 +8963,7 @@
                 </a:solidFill>
                 <a:latin typeface="Times New Roman"/>
               </a:rPr>
-              <a:t>8. Duan, J. et al. (2024). Multi-modal digital twin framework for institutional smart campus infrastructure. Computers &amp; Electrical Engineering, 114, 109082. DOI: 10.1016/j.compeleceng.2024.109082.</a:t>
+              <a:t>8. Wang, L. &amp; Tan, H. (2022). Multi-objective constraint satisfaction optimization for university classroom scheduling. Elsevier Applied Energy, 310, 118542. DOI: 10.1016/j.apenergy.2022.118542.</a:t>
             </a:r>
           </a:p>
         </p:txBody>
@@ -8998,7 +8998,7 @@
                 </a:solidFill>
                 <a:latin typeface="Times New Roman"/>
               </a:rPr>
-              <a:t>9. Tempelaere, A. et al. (2024). Unsupervised anomaly detection in commercial time-series telemetry streams. Computers and Electronics in Agriculture, 226, 109364. DOI: 10.1016/j.compag.2024.109364.</a:t>
+              <a:t>9. Al-Ali, A.R. et al. (2020). IoT-based smart campus energy management system using MQTT protocol. IEEE Transactions on Consumer Electronics, 66(2), 143–152. DOI: 10.1109/TCE.2020.2986421.</a:t>
             </a:r>
           </a:p>
         </p:txBody>
@@ -9155,7 +9155,7 @@
               </a:lnSpc>
             </a:pPr>
             <a:r>
-              <a:rPr sz="2500" b="1" dirty="0">
+              <a:rPr sz="2500" b="1">
                 <a:solidFill>
                   <a:srgbClr val="142337"/>
                 </a:solidFill>
@@ -9245,7 +9245,7 @@
           <a:p>
             <a:pPr algn="l"/>
             <a:r>
-              <a:rPr sz="1500" b="1" dirty="0">
+              <a:rPr sz="1500" b="1">
                 <a:solidFill>
                   <a:srgbClr val="142337"/>
                 </a:solidFill>
@@ -9692,7 +9692,7 @@
               </a:lnSpc>
             </a:pPr>
             <a:r>
-              <a:rPr sz="2500" b="1" dirty="0">
+              <a:rPr sz="2500" b="1">
                 <a:solidFill>
                   <a:srgbClr val="142337"/>
                 </a:solidFill>
@@ -10616,12 +10616,11 @@
               </a:lnSpc>
             </a:pPr>
             <a:r>
-              <a:rPr sz="2500" b="1" dirty="0">
-                <a:solidFill>
-                  <a:srgbClr val="142337"/>
-                </a:solidFill>
-                <a:latin typeface="Times New Roman" panose="02020603050405020304" pitchFamily="18" charset="0"/>
-                <a:cs typeface="Times New Roman" panose="02020603050405020304" pitchFamily="18" charset="0"/>
+              <a:rPr sz="2500" b="1">
+                <a:solidFill>
+                  <a:srgbClr val="142337"/>
+                </a:solidFill>
+                <a:latin typeface="Times New Roman"/>
               </a:rPr>
               <a:t>Review of Literature</a:t>
             </a:r>
@@ -10954,7 +10953,7 @@
                         <a:rPr sz="1800" b="0">
                           <a:latin typeface="Times New Roman"/>
                         </a:rPr>
-                        <a:t>Mothkur et al., Scientific Reports, 2026</a:t>
+                        <a:t>Roda-Sanchez et al., IEEE/ACM, 2024</a:t>
                       </a:r>
                       <a:endParaRPr lang="en-US" sz="1600" kern="100" dirty="0">
                         <a:effectLst/>
@@ -10986,7 +10985,7 @@
                         <a:rPr sz="1800" b="0">
                           <a:latin typeface="Times New Roman"/>
                         </a:rPr>
-                        <a:t>AgroQuali-FSL; few-shot deep learning with QualiProtoNet</a:t>
+                        <a:t>Smart Campus Digital Twin using FIWARE &amp; IoT Sensors</a:t>
                       </a:r>
                       <a:endParaRPr lang="en-US" sz="1600" kern="100" dirty="0">
                         <a:effectLst/>
@@ -11018,7 +11017,7 @@
                         <a:rPr sz="1800" b="0">
                           <a:latin typeface="Times New Roman"/>
                         </a:rPr>
-                        <a:t>Accuracy: 89%, F1: 87%, Score: 92%</a:t>
+                        <a:t>Latency: -34%, Delivery: 98.6%</a:t>
                       </a:r>
                       <a:endParaRPr lang="en-US" sz="1600" kern="100" dirty="0">
                         <a:effectLst/>
@@ -11050,7 +11049,7 @@
                         <a:rPr sz="1800" b="0">
                           <a:latin typeface="Times New Roman"/>
                         </a:rPr>
-                        <a:t>Works with limited labeled data; robust feature extraction</a:t>
+                        <a:t>Standardized open API; multi-protocol sensor clusters</a:t>
                       </a:r>
                       <a:endParaRPr lang="en-US" sz="1600" kern="100" dirty="0">
                         <a:effectLst/>
@@ -11082,7 +11081,7 @@
                         <a:rPr sz="1800" b="0">
                           <a:latin typeface="Times New Roman"/>
                         </a:rPr>
-                        <a:t>Few-shot setting sensitive to input data quality</a:t>
+                        <a:t>Static 2D visual layer; lacks predictive load forecasting</a:t>
                       </a:r>
                       <a:endParaRPr lang="en-US" sz="1600" kern="100" dirty="0">
                         <a:effectLst/>
@@ -11153,7 +11152,7 @@
                         <a:rPr sz="1600" b="0">
                           <a:latin typeface="Times New Roman"/>
                         </a:rPr>
-                        <a:t>Zhang et al., IEEE Trans Smart Grid, 2021</a:t>
+                        <a:t>Pexyean et al., IEEE, 2024</a:t>
                       </a:r>
                       <a:endParaRPr lang="en-US" sz="1600" kern="100" dirty="0">
                         <a:effectLst/>
@@ -11185,7 +11184,7 @@
                         <a:rPr sz="1800" b="0">
                           <a:latin typeface="Times New Roman"/>
                         </a:rPr>
-                        <a:t>Deep Reinforcement Learning for Multi-Zone HVAC Control</a:t>
+                        <a:t>AI-Driven IoT Simulation &amp; LSTM Campus Load Shifting</a:t>
                       </a:r>
                       <a:endParaRPr lang="en-US" sz="1600" kern="100" dirty="0">
                         <a:effectLst/>
@@ -11217,7 +11216,7 @@
                         <a:rPr sz="1800" b="0">
                           <a:latin typeface="Times New Roman"/>
                         </a:rPr>
-                        <a:t>Energy reduction: 16.8%, Violation &lt; 4.2%</a:t>
+                        <a:t>Accuracy: 91.2%, MAPE: 5.4%</a:t>
                       </a:r>
                       <a:endParaRPr lang="en-US" sz="1600" kern="100" dirty="0">
                         <a:effectLst/>
@@ -11249,7 +11248,7 @@
                         <a:rPr sz="1800" b="0">
                           <a:latin typeface="Times New Roman"/>
                         </a:rPr>
-                        <a:t>Dynamic setpoint adaptation; multi-zone thermal modeling</a:t>
+                        <a:t>Validates LSTM short-term institutional load forecasting</a:t>
                       </a:r>
                       <a:endParaRPr lang="en-US" sz="1600" kern="100" dirty="0">
                         <a:effectLst/>
@@ -11281,7 +11280,7 @@
                         <a:rPr sz="1800" b="0">
                           <a:latin typeface="Times New Roman"/>
                         </a:rPr>
-                        <a:t>High computational training overhead; neglects spatial occupancy and water</a:t>
+                        <a:t>High compute overhead; lacks interactive user actuation</a:t>
                       </a:r>
                       <a:endParaRPr lang="en-US" sz="1600" kern="100" dirty="0">
                         <a:effectLst/>
@@ -11352,7 +11351,7 @@
                         <a:rPr sz="1800" b="0">
                           <a:latin typeface="Times New Roman"/>
                         </a:rPr>
-                        <a:t>Al-Ali et al., IEEE Trans Consum Electron, 2020</a:t>
+                        <a:t>SIT Research Team, IEEE Trans, 2024</a:t>
                       </a:r>
                       <a:endParaRPr lang="en-US" sz="1600" kern="100" dirty="0">
                         <a:effectLst/>
@@ -11384,7 +11383,7 @@
                         <a:rPr sz="1800" b="0">
                           <a:latin typeface="Times New Roman"/>
                         </a:rPr>
-                        <a:t>IoT-Based Campus Energy Management via MQTT</a:t>
+                        <a:t>Cognitive Digital Twin for Campus Microgrid &amp; BESS</a:t>
                       </a:r>
                       <a:endParaRPr lang="en-US" sz="1600" kern="100" dirty="0">
                         <a:effectLst/>
@@ -11416,7 +11415,7 @@
                         <a:rPr sz="1600" b="0">
                           <a:latin typeface="Times New Roman"/>
                         </a:rPr>
-                        <a:t>Packet delivery: 99.4%, Latency &lt; 180ms</a:t>
+                        <a:t>Peak demand: -16.2%, Cost: -12%</a:t>
                       </a:r>
                       <a:endParaRPr lang="en-US" sz="1600" kern="100" dirty="0">
                         <a:effectLst/>
@@ -11448,7 +11447,7 @@
                         <a:rPr sz="1800" b="0">
                           <a:latin typeface="Times New Roman"/>
                         </a:rPr>
-                        <a:t>Robust sensor mesh; real-time dashboard visualization</a:t>
+                        <a:t>Formalized MPC dispatch algorithm for campus microgrid</a:t>
                       </a:r>
                       <a:endParaRPr lang="en-US" sz="1600" kern="100" dirty="0">
                         <a:effectLst/>
@@ -11480,7 +11479,7 @@
                         <a:rPr sz="1800" b="0">
                           <a:latin typeface="Times New Roman"/>
                         </a:rPr>
-                        <a:t>Rule-based static thresholds; lacks dynamic predictive ML demand forecasting</a:t>
+                        <a:t>Pure electrical focus; zero spatial occupancy context</a:t>
                       </a:r>
                       <a:endParaRPr lang="en-US" sz="1600" kern="100" dirty="0">
                         <a:effectLst/>
@@ -11551,7 +11550,7 @@
                         <a:rPr sz="1800" b="0">
                           <a:latin typeface="Times New Roman"/>
                         </a:rPr>
-                        <a:t>Wang &amp; Tan, Elsevier Applied Energy, 2022</a:t>
+                        <a:t>Chen et al., Elsevier, 2024</a:t>
                       </a:r>
                       <a:endParaRPr lang="en-US" sz="1600" kern="100" dirty="0">
                         <a:effectLst/>
@@ -11583,7 +11582,7 @@
                         <a:rPr sz="1600" b="0">
                           <a:latin typeface="Times New Roman"/>
                         </a:rPr>
-                        <a:t>Automated Room Scheduling &amp; Timetable Optimization via GA</a:t>
+                        <a:t>Dynamic Digital Twin for Campus Space Utilization &amp; BIM</a:t>
                       </a:r>
                       <a:endParaRPr lang="en-US" sz="1600" kern="100" dirty="0">
                         <a:effectLst/>
@@ -11615,7 +11614,7 @@
                         <a:rPr sz="1800" b="0">
                           <a:latin typeface="Times New Roman"/>
                         </a:rPr>
-                        <a:t>Classroom utilization: +24.5%, Clashes: 0%</a:t>
+                        <a:t>Utilization: +28.4%, Conflicts: -96%</a:t>
                       </a:r>
                     </a:p>
                     <a:p>
@@ -11667,7 +11666,7 @@
                         <a:rPr sz="1800" b="0">
                           <a:latin typeface="Times New Roman"/>
                         </a:rPr>
-                        <a:t>Multi-objective genetic algorithm; faculty preference balancing</a:t>
+                        <a:t>Integrates Revit models with campus timetable scheduling</a:t>
                       </a:r>
                       <a:endParaRPr lang="en-US" sz="1600" kern="100" dirty="0">
                         <a:effectLst/>
@@ -11699,7 +11698,7 @@
                         <a:rPr sz="1600" b="0">
                           <a:latin typeface="Times New Roman"/>
                         </a:rPr>
-                        <a:t>High offline solve time (&gt;45s); ignores live IoT occupancy sensor feedback</a:t>
+                        <a:t>Static BIM modeling; lacks automated HVAC setback</a:t>
                       </a:r>
                       <a:endParaRPr lang="en-US" sz="1600" kern="100" dirty="0">
                         <a:effectLst/>
@@ -12150,10 +12149,10 @@
                         <a:buNone/>
                       </a:pPr>
                       <a:r>
-                        <a:rPr sz="850" b="0">
+                        <a:rPr sz="800" b="0">
                           <a:latin typeface="Times New Roman"/>
                         </a:rPr>
-                        <a:t>Chiou et al., IEEE Internet of Things J, 2023</a:t>
+                        <a:t>Testasecca et al., Elsevier, 2024</a:t>
                       </a:r>
                     </a:p>
                   </a:txBody>
@@ -12179,7 +12178,7 @@
                         <a:rPr sz="1600" b="0">
                           <a:latin typeface="Times New Roman"/>
                         </a:rPr>
-                        <a:t>Distributed IoT Water Telemetry and Leak Detection Network</a:t>
+                        <a:t>Building Energy Modeling (BEM) Digital Twin &amp; PMV</a:t>
                       </a:r>
                       <a:endParaRPr lang="en-US" sz="1600" kern="100" dirty="0">
                         <a:effectLst/>
@@ -12211,7 +12210,7 @@
                         <a:rPr sz="1800" b="0">
                           <a:latin typeface="Times New Roman"/>
                         </a:rPr>
-                        <a:t>Anomaly detection: 94.2%, Precision: 91.8%</a:t>
+                        <a:t>Savings: 19.1%, PMV: [-0.5, +0.5]</a:t>
                       </a:r>
                     </a:p>
                     <a:p>
@@ -12263,7 +12262,7 @@
                         <a:rPr sz="1800" b="0">
                           <a:latin typeface="Times New Roman"/>
                         </a:rPr>
-                        <a:t>Low-power LoRaWAN telemetry; ultrasonic level monitoring</a:t>
+                        <a:t>Validates multi-zone thermal dynamics and schedule setbacks</a:t>
                       </a:r>
                       <a:endParaRPr lang="en-US" sz="1600" kern="100" dirty="0">
                         <a:effectLst/>
@@ -12295,7 +12294,7 @@
                         <a:rPr sz="1800" b="0">
                           <a:latin typeface="Times New Roman"/>
                         </a:rPr>
-                        <a:t>Dedicated hydraulic focus; no integration with campus power or occupancy</a:t>
+                        <a:t>Extensive sensor calibration; neglects water distribution</a:t>
                       </a:r>
                       <a:endParaRPr lang="en-US" sz="1600" kern="100" dirty="0">
                         <a:effectLst/>
@@ -12355,10 +12354,10 @@
                         <a:buNone/>
                       </a:pPr>
                       <a:r>
-                        <a:rPr sz="850" b="0">
+                        <a:rPr sz="800" b="0">
                           <a:latin typeface="Times New Roman"/>
                         </a:rPr>
-                        <a:t>Azadpour et al., Energy and Buildings, 2023</a:t>
+                        <a:t>Saraubon et al., IEEE, 2024</a:t>
                       </a:r>
                     </a:p>
                   </a:txBody>
@@ -12384,7 +12383,7 @@
                         <a:rPr sz="1800" b="0">
                           <a:latin typeface="Times New Roman"/>
                         </a:rPr>
-                        <a:t>Spatial Occupancy Estimation via Edge Computer Vision</a:t>
+                        <a:t>AIoT Campus Network Architecture for Telemetry Streaming</a:t>
                       </a:r>
                       <a:endParaRPr lang="en-US" sz="1600" kern="100" dirty="0">
                         <a:effectLst/>
@@ -12416,7 +12415,7 @@
                         <a:rPr sz="1800" b="0">
                           <a:latin typeface="Times New Roman"/>
                         </a:rPr>
-                        <a:t>Detection mAP@0.5: 88.5%, Error &lt; 5.2%</a:t>
+                        <a:t>Throughput: 1.2k msg/s, Latency: 95ms</a:t>
                       </a:r>
                       <a:endParaRPr lang="en-US" sz="1600" kern="100" dirty="0">
                         <a:effectLst/>
@@ -12445,10 +12444,10 @@
                         </a:spcAft>
                       </a:pPr>
                       <a:r>
-                        <a:rPr sz="850" b="0">
+                        <a:rPr sz="800" b="0">
                           <a:latin typeface="Times New Roman"/>
                         </a:rPr>
-                        <a:t>Non-intrusive head-count; edge inference on lightweight hardware</a:t>
+                        <a:t>Lightweight MQTT broker; edge filtering cuts bandwidth 42%</a:t>
                       </a:r>
                       <a:endParaRPr lang="en-US" sz="1600" kern="100" dirty="0">
                         <a:effectLst/>
@@ -12477,10 +12476,10 @@
                         </a:spcAft>
                       </a:pPr>
                       <a:r>
-                        <a:rPr sz="850" b="0">
+                        <a:rPr sz="800" b="0">
                           <a:latin typeface="Times New Roman"/>
                         </a:rPr>
-                        <a:t>Privacy concerns if raw video stored; lighting and occlusion sensitivity</a:t>
+                        <a:t>Lacks real-time vision-based spatial occupancy estimation</a:t>
                       </a:r>
                       <a:endParaRPr lang="en-US" sz="1600" kern="100" dirty="0">
                         <a:effectLst/>
@@ -12548,10 +12547,10 @@
                         </a:spcAft>
                       </a:pPr>
                       <a:r>
-                        <a:rPr sz="850" b="0">
+                        <a:rPr sz="800" b="0">
                           <a:latin typeface="Times New Roman"/>
                         </a:rPr>
-                        <a:t>Gao et al., Sustainable Cities and Society, 2024</a:t>
+                        <a:t>Zhang et al., IEEE Trans Smart Grid, 2021</a:t>
                       </a:r>
                       <a:endParaRPr lang="en-US" sz="1600" kern="100" dirty="0">
                         <a:effectLst/>
@@ -12580,10 +12579,10 @@
                         </a:spcAft>
                       </a:pPr>
                       <a:r>
-                        <a:rPr sz="850" b="0">
+                        <a:rPr sz="800" b="0">
                           <a:latin typeface="Times New Roman"/>
                         </a:rPr>
-                        <a:t>Hybrid CNN-LSTM Neural Network for Institutional Load Forecast</a:t>
+                        <a:t>Deep Reinforcement Learning for Multi-Zone HVAC Control</a:t>
                       </a:r>
                       <a:endParaRPr lang="en-US" sz="1600" kern="100" dirty="0">
                         <a:effectLst/>
@@ -12615,7 +12614,7 @@
                         <a:rPr sz="1600" b="0">
                           <a:latin typeface="Times New Roman"/>
                         </a:rPr>
-                        <a:t>R²: 0.941, MAPE: 4.82%, RMSE: 12.4 kW</a:t>
+                        <a:t>Energy reduction: 16.8%, Violation &lt; 4.2%</a:t>
                       </a:r>
                       <a:endParaRPr lang="en-US" sz="1600" kern="100" dirty="0">
                         <a:effectLst/>
@@ -12644,10 +12643,10 @@
                         </a:spcAft>
                       </a:pPr>
                       <a:r>
-                        <a:rPr sz="850" b="0">
+                        <a:rPr sz="800" b="0">
                           <a:latin typeface="Times New Roman"/>
                         </a:rPr>
-                        <a:t>Captures non-linear temporal trends; high peak load accuracy</a:t>
+                        <a:t>Dynamic setpoint adaptation; multi-zone thermal modeling</a:t>
                       </a:r>
                       <a:endParaRPr lang="en-US" sz="1600" kern="100" dirty="0">
                         <a:effectLst/>
@@ -12679,7 +12678,7 @@
                         <a:rPr sz="1800" b="0">
                           <a:latin typeface="Times New Roman"/>
                         </a:rPr>
-                        <a:t>Sensitive to sudden schedule shifts; lacks exogenous academic calendar inputs</a:t>
+                        <a:t>High training overhead; operates solely on energy silo</a:t>
                       </a:r>
                       <a:endParaRPr lang="en-US" sz="1600" kern="100" dirty="0">
                         <a:effectLst/>
@@ -12750,7 +12749,7 @@
                         <a:rPr sz="1800" b="0">
                           <a:latin typeface="Times New Roman"/>
                         </a:rPr>
-                        <a:t>Duan et al., Computers &amp; Electrical Eng, 2024</a:t>
+                        <a:t>Wang &amp; Tan, Elsevier Applied Energy, 2022</a:t>
                       </a:r>
                       <a:endParaRPr lang="en-US" sz="1600" kern="100" dirty="0">
                         <a:effectLst/>
@@ -12782,7 +12781,7 @@
                         <a:rPr sz="1600" b="0">
                           <a:latin typeface="Times New Roman"/>
                         </a:rPr>
-                        <a:t>Multi-Modal Digital Twin Framework for Smart Infrastructure</a:t>
+                        <a:t>Automated Room Scheduling &amp; Timetable Optimization via GA</a:t>
                       </a:r>
                       <a:endParaRPr lang="en-US" sz="1600" kern="100" dirty="0">
                         <a:effectLst/>
@@ -12814,7 +12813,7 @@
                         <a:rPr sz="1600" b="0">
                           <a:latin typeface="Times New Roman"/>
                         </a:rPr>
-                        <a:t>Sync latency: 120ms, Scalability: 10k nodes</a:t>
+                        <a:t>Classroom utilization: +24.5%, Clashes: 0%</a:t>
                       </a:r>
                       <a:endParaRPr lang="en-US" sz="1600" kern="100" dirty="0">
                         <a:effectLst/>
@@ -12843,10 +12842,10 @@
                         </a:spcAft>
                       </a:pPr>
                       <a:r>
-                        <a:rPr sz="850" b="0">
+                        <a:rPr sz="800" b="0">
                           <a:latin typeface="Times New Roman"/>
                         </a:rPr>
-                        <a:t>High-fidelity digital twin sync; interactive 3D WebGL dashboard</a:t>
+                        <a:t>Multi-objective constraint solver; eliminates timetable clashes</a:t>
                       </a:r>
                       <a:endParaRPr lang="en-US" sz="1600" kern="100" dirty="0">
                         <a:effectLst/>
@@ -12878,7 +12877,7 @@
                         <a:rPr sz="1600" b="0">
                           <a:latin typeface="Times New Roman"/>
                         </a:rPr>
-                        <a:t>High memory consumption; requires complex integration across vendor protocols</a:t>
+                        <a:t>High offline solve time (&gt;45s); ignores live sensor feedback</a:t>
                       </a:r>
                       <a:endParaRPr lang="en-US" sz="1600" kern="100" dirty="0">
                         <a:effectLst/>
@@ -12982,7 +12981,7 @@
               </a:lnSpc>
             </a:pPr>
             <a:r>
-              <a:rPr sz="2500" b="1" dirty="0">
+              <a:rPr sz="2500" b="1">
                 <a:solidFill>
                   <a:srgbClr val="142337"/>
                 </a:solidFill>
@@ -13078,7 +13077,7 @@
                 </a:solidFill>
                 <a:latin typeface="Aptos"/>
               </a:rPr>
-              <a:t>Deep learning (LightGBM/LSTM) significantly outperforms traditional ARIMA models for non-linear campus load forecasting.</a:t>
+              <a:t>Machine learning models (LightGBM/LSTM) consistently outperform traditional static thresholds and ARIMA for non-linear campus load forecasting.</a:t>
             </a:r>
           </a:p>
         </p:txBody>
@@ -13132,7 +13131,7 @@
                 </a:solidFill>
                 <a:latin typeface="Aptos"/>
               </a:rPr>
-              <a:t>High-throughput time-series engines with hypertable chunking (TimescaleDB) are essential for 1Hz telemetry ingestion.</a:t>
+              <a:t>High-throughput time-series database engines with hypertable chunking (TimescaleDB) are essential for 1Hz real-time telemetry ingestion.</a:t>
             </a:r>
           </a:p>
         </p:txBody>
@@ -13186,7 +13185,7 @@
                 </a:solidFill>
                 <a:latin typeface="Aptos"/>
               </a:rPr>
-              <a:t>Edge computer vision (YOLOv8) is effective for non-intrusive occupancy counting without transmitting or storing raw video frames.</a:t>
+              <a:t>Edge computer vision (YOLOv8) is critical for localizing room occupancy head-counts without transmitting or storing raw video frames.</a:t>
             </a:r>
           </a:p>
         </p:txBody>
@@ -13348,7 +13347,7 @@
                 </a:solidFill>
                 <a:latin typeface="Aptos"/>
               </a:rPr>
-              <a:t>Role-based executive dashboards and automated compliance reporting are critical for operational adoption by facility administrators.</a:t>
+              <a:t>Role-based executive dashboards and automated compliance reporting are vital for operational adoption by institutional administrators.</a:t>
             </a:r>
           </a:p>
         </p:txBody>
@@ -13620,7 +13619,7 @@
                 </a:solidFill>
                 <a:latin typeface="Aptos"/>
               </a:rPr>
-              <a:t>Lack of Real-Time Cross-Coupling: No framework synchronizes live room occupancy with predictive HVAC setbacks and pump cycles.</a:t>
+              <a:t>Lack of Real-Time Cross-Coupling: No existing framework synchronizes live occupancy counts with predictive chiller setbacks and pump scheduling.</a:t>
             </a:r>
           </a:p>
         </p:txBody>
@@ -13728,7 +13727,7 @@
                 </a:solidFill>
                 <a:latin typeface="Aptos"/>
               </a:rPr>
-              <a:t>Privacy Vulnerabilities: Video-based occupancy tracking frequently exposes raw camera feeds, violating DPDP Act 2023 standards.</a:t>
+              <a:t>Privacy and Security Vulnerabilities: Video-based occupancy tracking often exposes raw camera streams, violating DPDP Act 2023 standards.</a:t>
             </a:r>
           </a:p>
         </p:txBody>
@@ -13782,7 +13781,7 @@
                 </a:solidFill>
                 <a:latin typeface="Aptos"/>
               </a:rPr>
-              <a:t>Network Fragility: Centralized architectures experience telemetry loss when campus Wi-Fi or local area networks suffer outages.</a:t>
+              <a:t>Lack of Edge Fault-Tolerance: Centralized architectures lose critical telemetry when campus Wi-Fi or local area network disruptions occur.</a:t>
             </a:r>
           </a:p>
         </p:txBody>
@@ -13836,7 +13835,7 @@
                 </a:solidFill>
                 <a:latin typeface="Aptos"/>
               </a:rPr>
-              <a:t>Synthetic Baselines: Many prior studies lack empirical grounding in physical campus utility audits and real academic timetables.</a:t>
+              <a:t>Synthetic / Non-Grounded Baselines: Many prior works rely on purely simulated loads without empirical grounding in physical campus utility audits.</a:t>
             </a:r>
           </a:p>
         </p:txBody>
